--- a/Science_Complete_Course_SagarSir/01_Physics_भौतिक_विज्ञान/Class_03_Electricity_Circuits_Magnetism.pptx
+++ b/Science_Complete_Course_SagarSir/01_Physics_भौतिक_विज्ञान/Class_03_Electricity_Circuits_Magnetism.pptx
@@ -3553,7 +3553,7 @@
               </a:defRPr>
             </a:pPr>
             <a:r>
-              <a:t>मार्गदर्शक: सागर सर (NMMS King)  |  Helpline / WhatsApp: +91 91101 13671  |  Website: sagarcoaching.tech</a:t>
+              <a:t>मार्गदर्शक: सागर सर (NMMS King)  |  Website: sagarcoaching.tech</a:t>
             </a:r>
           </a:p>
         </p:txBody>
@@ -3725,7 +3725,7 @@
               </a:defRPr>
             </a:pPr>
             <a:r>
-              <a:t>WhatsApp / Helpline: +91 91101 13671  |  वेबसाइट: sagarcoaching.tech  |  Slide 10 of 37</a:t>
+              <a:t>वेबसाइट: sagarcoaching.tech  |  Slide 10 of 37</a:t>
             </a:r>
           </a:p>
         </p:txBody>
@@ -4243,7 +4243,7 @@
               </a:defRPr>
             </a:pPr>
             <a:r>
-              <a:t>WhatsApp / Helpline: +91 91101 13671  |  वेबसाइट: sagarcoaching.tech  |  Slide 11 of 37</a:t>
+              <a:t>वेबसाइट: sagarcoaching.tech  |  Slide 11 of 37</a:t>
             </a:r>
           </a:p>
         </p:txBody>
@@ -4690,7 +4690,7 @@
               </a:defRPr>
             </a:pPr>
             <a:r>
-              <a:t>WhatsApp / Helpline: +91 91101 13671  |  वेबसाइट: sagarcoaching.tech  |  Slide 12 of 37</a:t>
+              <a:t>वेबसाइट: sagarcoaching.tech  |  Slide 12 of 37</a:t>
             </a:r>
           </a:p>
         </p:txBody>
@@ -5208,7 +5208,7 @@
               </a:defRPr>
             </a:pPr>
             <a:r>
-              <a:t>WhatsApp / Helpline: +91 91101 13671  |  वेबसाइट: sagarcoaching.tech  |  Slide 13 of 37</a:t>
+              <a:t>वेबसाइट: sagarcoaching.tech  |  Slide 13 of 37</a:t>
             </a:r>
           </a:p>
         </p:txBody>
@@ -5655,7 +5655,7 @@
               </a:defRPr>
             </a:pPr>
             <a:r>
-              <a:t>WhatsApp / Helpline: +91 91101 13671  |  वेबसाइट: sagarcoaching.tech  |  Slide 14 of 37</a:t>
+              <a:t>वेबसाइट: sagarcoaching.tech  |  Slide 14 of 37</a:t>
             </a:r>
           </a:p>
         </p:txBody>
@@ -6173,7 +6173,7 @@
               </a:defRPr>
             </a:pPr>
             <a:r>
-              <a:t>WhatsApp / Helpline: +91 91101 13671  |  वेबसाइट: sagarcoaching.tech  |  Slide 15 of 37</a:t>
+              <a:t>वेबसाइट: sagarcoaching.tech  |  Slide 15 of 37</a:t>
             </a:r>
           </a:p>
         </p:txBody>
@@ -6620,7 +6620,7 @@
               </a:defRPr>
             </a:pPr>
             <a:r>
-              <a:t>WhatsApp / Helpline: +91 91101 13671  |  वेबसाइट: sagarcoaching.tech  |  Slide 16 of 37</a:t>
+              <a:t>वेबसाइट: sagarcoaching.tech  |  Slide 16 of 37</a:t>
             </a:r>
           </a:p>
         </p:txBody>
@@ -7138,7 +7138,7 @@
               </a:defRPr>
             </a:pPr>
             <a:r>
-              <a:t>WhatsApp / Helpline: +91 91101 13671  |  वेबसाइट: sagarcoaching.tech  |  Slide 17 of 37</a:t>
+              <a:t>वेबसाइट: sagarcoaching.tech  |  Slide 17 of 37</a:t>
             </a:r>
           </a:p>
         </p:txBody>
@@ -7585,7 +7585,7 @@
               </a:defRPr>
             </a:pPr>
             <a:r>
-              <a:t>WhatsApp / Helpline: +91 91101 13671  |  वेबसाइट: sagarcoaching.tech  |  Slide 18 of 37</a:t>
+              <a:t>वेबसाइट: sagarcoaching.tech  |  Slide 18 of 37</a:t>
             </a:r>
           </a:p>
         </p:txBody>
@@ -8103,7 +8103,7 @@
               </a:defRPr>
             </a:pPr>
             <a:r>
-              <a:t>WhatsApp / Helpline: +91 91101 13671  |  वेबसाइट: sagarcoaching.tech  |  Slide 19 of 37</a:t>
+              <a:t>वेबसाइट: sagarcoaching.tech  |  Slide 19 of 37</a:t>
             </a:r>
           </a:p>
         </p:txBody>
@@ -8550,7 +8550,7 @@
               </a:defRPr>
             </a:pPr>
             <a:r>
-              <a:t>WhatsApp / Helpline: +91 91101 13671  |  वेबसाइट: sagarcoaching.tech  |  Slide 2 of 37</a:t>
+              <a:t>वेबसाइट: sagarcoaching.tech  |  Slide 2 of 37</a:t>
             </a:r>
           </a:p>
         </p:txBody>
@@ -8891,7 +8891,7 @@
               </a:defRPr>
             </a:pPr>
             <a:r>
-              <a:t>WhatsApp / Helpline: +91 91101 13671  |  वेबसाइट: sagarcoaching.tech  |  Slide 20 of 37</a:t>
+              <a:t>वेबसाइट: sagarcoaching.tech  |  Slide 20 of 37</a:t>
             </a:r>
           </a:p>
         </p:txBody>
@@ -9409,7 +9409,7 @@
               </a:defRPr>
             </a:pPr>
             <a:r>
-              <a:t>WhatsApp / Helpline: +91 91101 13671  |  वेबसाइट: sagarcoaching.tech  |  Slide 21 of 37</a:t>
+              <a:t>वेबसाइट: sagarcoaching.tech  |  Slide 21 of 37</a:t>
             </a:r>
           </a:p>
         </p:txBody>
@@ -9856,7 +9856,7 @@
               </a:defRPr>
             </a:pPr>
             <a:r>
-              <a:t>WhatsApp / Helpline: +91 91101 13671  |  वेबसाइट: sagarcoaching.tech  |  Slide 22 of 37</a:t>
+              <a:t>वेबसाइट: sagarcoaching.tech  |  Slide 22 of 37</a:t>
             </a:r>
           </a:p>
         </p:txBody>
@@ -10374,7 +10374,7 @@
               </a:defRPr>
             </a:pPr>
             <a:r>
-              <a:t>WhatsApp / Helpline: +91 91101 13671  |  वेबसाइट: sagarcoaching.tech  |  Slide 23 of 37</a:t>
+              <a:t>वेबसाइट: sagarcoaching.tech  |  Slide 23 of 37</a:t>
             </a:r>
           </a:p>
         </p:txBody>
@@ -10821,7 +10821,7 @@
               </a:defRPr>
             </a:pPr>
             <a:r>
-              <a:t>WhatsApp / Helpline: +91 91101 13671  |  वेबसाइट: sagarcoaching.tech  |  Slide 24 of 37</a:t>
+              <a:t>वेबसाइट: sagarcoaching.tech  |  Slide 24 of 37</a:t>
             </a:r>
           </a:p>
         </p:txBody>
@@ -11339,7 +11339,7 @@
               </a:defRPr>
             </a:pPr>
             <a:r>
-              <a:t>WhatsApp / Helpline: +91 91101 13671  |  वेबसाइट: sagarcoaching.tech  |  Slide 25 of 37</a:t>
+              <a:t>वेबसाइट: sagarcoaching.tech  |  Slide 25 of 37</a:t>
             </a:r>
           </a:p>
         </p:txBody>
@@ -11786,7 +11786,7 @@
               </a:defRPr>
             </a:pPr>
             <a:r>
-              <a:t>WhatsApp / Helpline: +91 91101 13671  |  वेबसाइट: sagarcoaching.tech  |  Slide 26 of 37</a:t>
+              <a:t>वेबसाइट: sagarcoaching.tech  |  Slide 26 of 37</a:t>
             </a:r>
           </a:p>
         </p:txBody>
@@ -12304,7 +12304,7 @@
               </a:defRPr>
             </a:pPr>
             <a:r>
-              <a:t>WhatsApp / Helpline: +91 91101 13671  |  वेबसाइट: sagarcoaching.tech  |  Slide 27 of 37</a:t>
+              <a:t>वेबसाइट: sagarcoaching.tech  |  Slide 27 of 37</a:t>
             </a:r>
           </a:p>
         </p:txBody>
@@ -12751,7 +12751,7 @@
               </a:defRPr>
             </a:pPr>
             <a:r>
-              <a:t>WhatsApp / Helpline: +91 91101 13671  |  वेबसाइट: sagarcoaching.tech  |  Slide 28 of 37</a:t>
+              <a:t>वेबसाइट: sagarcoaching.tech  |  Slide 28 of 37</a:t>
             </a:r>
           </a:p>
         </p:txBody>
@@ -13269,7 +13269,7 @@
               </a:defRPr>
             </a:pPr>
             <a:r>
-              <a:t>WhatsApp / Helpline: +91 91101 13671  |  वेबसाइट: sagarcoaching.tech  |  Slide 29 of 37</a:t>
+              <a:t>वेबसाइट: sagarcoaching.tech  |  Slide 29 of 37</a:t>
             </a:r>
           </a:p>
         </p:txBody>
@@ -13716,7 +13716,7 @@
               </a:defRPr>
             </a:pPr>
             <a:r>
-              <a:t>WhatsApp / Helpline: +91 91101 13671  |  वेबसाइट: sagarcoaching.tech  |  Slide 3 of 37</a:t>
+              <a:t>वेबसाइट: sagarcoaching.tech  |  Slide 3 of 37</a:t>
             </a:r>
           </a:p>
         </p:txBody>
@@ -14019,7 +14019,7 @@
               </a:defRPr>
             </a:pPr>
             <a:r>
-              <a:t>WhatsApp / Helpline: +91 91101 13671  |  वेबसाइट: sagarcoaching.tech  |  Slide 30 of 37</a:t>
+              <a:t>वेबसाइट: sagarcoaching.tech  |  Slide 30 of 37</a:t>
             </a:r>
           </a:p>
         </p:txBody>
@@ -14537,7 +14537,7 @@
               </a:defRPr>
             </a:pPr>
             <a:r>
-              <a:t>WhatsApp / Helpline: +91 91101 13671  |  वेबसाइट: sagarcoaching.tech  |  Slide 31 of 37</a:t>
+              <a:t>वेबसाइट: sagarcoaching.tech  |  Slide 31 of 37</a:t>
             </a:r>
           </a:p>
         </p:txBody>
@@ -14984,7 +14984,7 @@
               </a:defRPr>
             </a:pPr>
             <a:r>
-              <a:t>WhatsApp / Helpline: +91 91101 13671  |  वेबसाइट: sagarcoaching.tech  |  Slide 32 of 37</a:t>
+              <a:t>वेबसाइट: sagarcoaching.tech  |  Slide 32 of 37</a:t>
             </a:r>
           </a:p>
         </p:txBody>
@@ -15502,7 +15502,7 @@
               </a:defRPr>
             </a:pPr>
             <a:r>
-              <a:t>WhatsApp / Helpline: +91 91101 13671  |  वेबसाइट: sagarcoaching.tech  |  Slide 33 of 37</a:t>
+              <a:t>वेबसाइट: sagarcoaching.tech  |  Slide 33 of 37</a:t>
             </a:r>
           </a:p>
         </p:txBody>
@@ -15949,7 +15949,7 @@
               </a:defRPr>
             </a:pPr>
             <a:r>
-              <a:t>WhatsApp / Helpline: +91 91101 13671  |  वेबसाइट: sagarcoaching.tech  |  Slide 34 of 37</a:t>
+              <a:t>वेबसाइट: sagarcoaching.tech  |  Slide 34 of 37</a:t>
             </a:r>
           </a:p>
         </p:txBody>
@@ -16467,7 +16467,7 @@
               </a:defRPr>
             </a:pPr>
             <a:r>
-              <a:t>WhatsApp / Helpline: +91 91101 13671  |  वेबसाइट: sagarcoaching.tech  |  Slide 35 of 37</a:t>
+              <a:t>वेबसाइट: sagarcoaching.tech  |  Slide 35 of 37</a:t>
             </a:r>
           </a:p>
         </p:txBody>
@@ -16808,7 +16808,7 @@
               </a:defRPr>
             </a:pPr>
             <a:r>
-              <a:t>WhatsApp / Helpline: +91 91101 13671  |  वेबसाइट: sagarcoaching.tech  |  Slide 36 of 37</a:t>
+              <a:t>वेबसाइट: sagarcoaching.tech  |  Slide 36 of 37</a:t>
             </a:r>
           </a:p>
         </p:txBody>
@@ -17201,7 +17201,7 @@
               </a:defRPr>
             </a:pPr>
             <a:r>
-              <a:t>इस क्लास की PDF डाउनलोड करें: sagarcoaching.tech | Helpline: +91 91101 13671</a:t>
+              <a:t>इस क्लास की PDF डाउनलोड करें: sagarcoaching.tech</a:t>
             </a:r>
           </a:p>
         </p:txBody>
@@ -17356,7 +17356,7 @@
               </a:defRPr>
             </a:pPr>
             <a:r>
-              <a:t>मार्गदर्शक: सागर सर (NMMS King)  |  Helpline / WhatsApp: +91 91101 13671  |  Website: sagarcoaching.tech</a:t>
+              <a:t>मार्गदर्शक: सागर सर (NMMS King)  |  Website: sagarcoaching.tech</a:t>
             </a:r>
           </a:p>
         </p:txBody>
@@ -17528,7 +17528,7 @@
               </a:defRPr>
             </a:pPr>
             <a:r>
-              <a:t>WhatsApp / Helpline: +91 91101 13671  |  वेबसाइट: sagarcoaching.tech  |  Slide 4 of 37</a:t>
+              <a:t>वेबसाइट: sagarcoaching.tech  |  Slide 4 of 37</a:t>
             </a:r>
           </a:p>
         </p:txBody>
@@ -17831,7 +17831,7 @@
               </a:defRPr>
             </a:pPr>
             <a:r>
-              <a:t>WhatsApp / Helpline: +91 91101 13671  |  वेबसाइट: sagarcoaching.tech  |  Slide 5 of 37</a:t>
+              <a:t>वेबसाइट: sagarcoaching.tech  |  Slide 5 of 37</a:t>
             </a:r>
           </a:p>
         </p:txBody>
@@ -18278,7 +18278,7 @@
               </a:defRPr>
             </a:pPr>
             <a:r>
-              <a:t>WhatsApp / Helpline: +91 91101 13671  |  वेबसाइट: sagarcoaching.tech  |  Slide 6 of 37</a:t>
+              <a:t>वेबसाइट: sagarcoaching.tech  |  Slide 6 of 37</a:t>
             </a:r>
           </a:p>
         </p:txBody>
@@ -18796,7 +18796,7 @@
               </a:defRPr>
             </a:pPr>
             <a:r>
-              <a:t>WhatsApp / Helpline: +91 91101 13671  |  वेबसाइट: sagarcoaching.tech  |  Slide 7 of 37</a:t>
+              <a:t>वेबसाइट: sagarcoaching.tech  |  Slide 7 of 37</a:t>
             </a:r>
           </a:p>
         </p:txBody>
@@ -19243,7 +19243,7 @@
               </a:defRPr>
             </a:pPr>
             <a:r>
-              <a:t>WhatsApp / Helpline: +91 91101 13671  |  वेबसाइट: sagarcoaching.tech  |  Slide 8 of 37</a:t>
+              <a:t>वेबसाइट: sagarcoaching.tech  |  Slide 8 of 37</a:t>
             </a:r>
           </a:p>
         </p:txBody>
@@ -19761,7 +19761,7 @@
               </a:defRPr>
             </a:pPr>
             <a:r>
-              <a:t>WhatsApp / Helpline: +91 91101 13671  |  वेबसाइट: sagarcoaching.tech  |  Slide 9 of 37</a:t>
+              <a:t>वेबसाइट: sagarcoaching.tech  |  Slide 9 of 37</a:t>
             </a:r>
           </a:p>
         </p:txBody>
